--- a/material/2_Python/11_클래스기초_OOP.pptx
+++ b/material/2_Python/11_클래스기초_OOP.pptx
@@ -33,15 +33,15 @@
       <p:bold r:id="rId19"/>
     </p:embeddedFont>
     <p:embeddedFont>
-      <p:font typeface="Pretendard Black" panose="02000A03000000020004" pitchFamily="2" charset="-127"/>
+      <p:font typeface="Pretendard Black" panose="02000A03000000020004" pitchFamily="50" charset="-127"/>
       <p:bold r:id="rId20"/>
     </p:embeddedFont>
     <p:embeddedFont>
-      <p:font typeface="Pretendard Light" panose="02000403000000020004" pitchFamily="2" charset="-127"/>
+      <p:font typeface="Pretendard Light" panose="02000403000000020004" pitchFamily="50" charset="-127"/>
       <p:regular r:id="rId21"/>
     </p:embeddedFont>
     <p:embeddedFont>
-      <p:font typeface="Pretendard Medium" panose="02000603000000020004" pitchFamily="2" charset="-127"/>
+      <p:font typeface="Pretendard Medium" panose="02000603000000020004" pitchFamily="50" charset="-127"/>
       <p:regular r:id="rId22"/>
     </p:embeddedFont>
     <p:embeddedFont>
@@ -251,7 +251,7 @@
           <a:p>
             <a:fld id="{2229C11E-4EF0-425E-89BA-56B170901842}" type="datetimeFigureOut">
               <a:rPr lang="ko-KR" altLang="en-US" smtClean="0"/>
-              <a:t>2025-09-01</a:t>
+              <a:t>2025-11-07</a:t>
             </a:fld>
             <a:endParaRPr lang="ko-KR" altLang="en-US"/>
           </a:p>
@@ -750,7 +750,7 @@
           <a:p>
             <a:fld id="{9C6F2426-F011-4048-96E6-328581C59A1B}" type="datetimeFigureOut">
               <a:rPr lang="ko-KR" altLang="en-US" smtClean="0"/>
-              <a:t>2025-09-01</a:t>
+              <a:t>2025-11-07</a:t>
             </a:fld>
             <a:endParaRPr lang="ko-KR" altLang="en-US"/>
           </a:p>
@@ -1037,7 +1037,7 @@
           <a:p>
             <a:fld id="{9C6F2426-F011-4048-96E6-328581C59A1B}" type="datetimeFigureOut">
               <a:rPr lang="ko-KR" altLang="en-US" smtClean="0"/>
-              <a:t>2025-09-01</a:t>
+              <a:t>2025-11-07</a:t>
             </a:fld>
             <a:endParaRPr lang="ko-KR" altLang="en-US"/>
           </a:p>
@@ -1212,7 +1212,7 @@
           <a:p>
             <a:fld id="{9C6F2426-F011-4048-96E6-328581C59A1B}" type="datetimeFigureOut">
               <a:rPr lang="ko-KR" altLang="en-US" smtClean="0"/>
-              <a:t>2025-09-01</a:t>
+              <a:t>2025-11-07</a:t>
             </a:fld>
             <a:endParaRPr lang="ko-KR" altLang="en-US"/>
           </a:p>
@@ -1368,7 +1368,7 @@
           <a:p>
             <a:fld id="{9C6F2426-F011-4048-96E6-328581C59A1B}" type="datetimeFigureOut">
               <a:rPr lang="ko-KR" altLang="en-US" smtClean="0"/>
-              <a:t>2025-09-01</a:t>
+              <a:t>2025-11-07</a:t>
             </a:fld>
             <a:endParaRPr lang="ko-KR" altLang="en-US"/>
           </a:p>
@@ -1509,7 +1509,7 @@
           <a:p>
             <a:fld id="{9C6F2426-F011-4048-96E6-328581C59A1B}" type="datetimeFigureOut">
               <a:rPr lang="ko-KR" altLang="en-US" smtClean="0"/>
-              <a:t>2025-09-01</a:t>
+              <a:t>2025-11-07</a:t>
             </a:fld>
             <a:endParaRPr lang="ko-KR" altLang="en-US"/>
           </a:p>
@@ -1838,7 +1838,7 @@
           <a:p>
             <a:fld id="{9C6F2426-F011-4048-96E6-328581C59A1B}" type="datetimeFigureOut">
               <a:rPr lang="ko-KR" altLang="en-US" smtClean="0"/>
-              <a:t>2025-09-01</a:t>
+              <a:t>2025-11-07</a:t>
             </a:fld>
             <a:endParaRPr lang="ko-KR" altLang="en-US"/>
           </a:p>
@@ -3017,8 +3017,8 @@
         </p:nvSpPr>
         <p:spPr>
           <a:xfrm>
-            <a:off x="2187936" y="5645570"/>
-            <a:ext cx="6727464" cy="743043"/>
+            <a:off x="2187935" y="5645570"/>
+            <a:ext cx="7242503" cy="743043"/>
           </a:xfrm>
           <a:prstGeom prst="rect">
             <a:avLst/>
